--- a/presentation/lakshx-pitch-deck.pptx
+++ b/presentation/lakshx-pitch-deck.pptx
@@ -6349,7 +6349,7 @@
                 </a:solidFill>
                 <a:latin typeface="Consolas"/>
               </a:rPr>
-              <a:t>github.com/lakshx-ide/lakshx     </a:t>
+              <a:t>github.com/BeastxD7/LakshX-IDE     </a:t>
             </a:r>
             <a:r>
               <a:rPr sz="1000" b="0" i="0">
@@ -6358,7 +6358,7 @@
                 </a:solidFill>
                 <a:latin typeface="Consolas"/>
               </a:rPr>
-              <a:t>[ your contact here ]</a:t>
+              <a:t>contact@lakshx.in</a:t>
             </a:r>
           </a:p>
         </p:txBody>
